--- a/docs/MANACTIONS - Gestão de Processos Internos.pptx
+++ b/docs/MANACTIONS - Gestão de Processos Internos.pptx
@@ -5,7 +5,7 @@
     <p:sldMasterId id="2147483659" r:id="rId1"/>
   </p:sldMasterIdLst>
   <p:notesMasterIdLst>
-    <p:notesMasterId r:id="rId15"/>
+    <p:notesMasterId r:id="rId16"/>
   </p:notesMasterIdLst>
   <p:sldIdLst>
     <p:sldId id="256" r:id="rId2"/>
@@ -20,31 +20,32 @@
     <p:sldId id="265" r:id="rId11"/>
     <p:sldId id="266" r:id="rId12"/>
     <p:sldId id="267" r:id="rId13"/>
-    <p:sldId id="268" r:id="rId14"/>
+    <p:sldId id="269" r:id="rId14"/>
+    <p:sldId id="268" r:id="rId15"/>
   </p:sldIdLst>
   <p:sldSz cx="12192000" cy="6858000"/>
   <p:notesSz cx="6858000" cy="9144000"/>
   <p:embeddedFontLst>
     <p:embeddedFont>
       <p:font typeface="Calibri" panose="020F0502020204030204" pitchFamily="34" charset="0"/>
-      <p:regular r:id="rId16"/>
-      <p:bold r:id="rId17"/>
-      <p:italic r:id="rId18"/>
-      <p:boldItalic r:id="rId19"/>
+      <p:regular r:id="rId17"/>
+      <p:bold r:id="rId18"/>
+      <p:italic r:id="rId19"/>
+      <p:boldItalic r:id="rId20"/>
     </p:embeddedFont>
     <p:embeddedFont>
       <p:font typeface="Urbanist" panose="020B0604020202020204" charset="0"/>
-      <p:regular r:id="rId20"/>
-      <p:bold r:id="rId21"/>
-      <p:italic r:id="rId22"/>
-      <p:boldItalic r:id="rId23"/>
+      <p:regular r:id="rId21"/>
+      <p:bold r:id="rId22"/>
+      <p:italic r:id="rId23"/>
+      <p:boldItalic r:id="rId24"/>
     </p:embeddedFont>
     <p:embeddedFont>
       <p:font typeface="Urbanist Medium" panose="020B0604020202020204" charset="0"/>
-      <p:regular r:id="rId24"/>
-      <p:bold r:id="rId25"/>
-      <p:italic r:id="rId26"/>
-      <p:boldItalic r:id="rId27"/>
+      <p:regular r:id="rId25"/>
+      <p:bold r:id="rId26"/>
+      <p:italic r:id="rId27"/>
+      <p:boldItalic r:id="rId28"/>
     </p:embeddedFont>
   </p:embeddedFontLst>
   <p:defaultTextStyle>
@@ -907,8 +908,8 @@
         </p:nvSpPr>
         <p:spPr>
           <a:xfrm>
-            <a:off x="1143225" y="685800"/>
-            <a:ext cx="4572225" cy="3429000"/>
+            <a:off x="381000" y="685800"/>
+            <a:ext cx="6096000" cy="3429000"/>
           </a:xfrm>
           <a:custGeom>
             <a:avLst/>
@@ -1115,8 +1116,8 @@
         </p:nvSpPr>
         <p:spPr>
           <a:xfrm>
-            <a:off x="1143225" y="685800"/>
-            <a:ext cx="4572225" cy="3429000"/>
+            <a:off x="381000" y="685800"/>
+            <a:ext cx="6096000" cy="3429000"/>
           </a:xfrm>
           <a:custGeom>
             <a:avLst/>
@@ -1153,6 +1154,115 @@
 </file>
 
 <file path=ppt/notesSlides/notesSlide13.xml><?xml version="1.0" encoding="utf-8"?>
+<p:notes xmlns:a="http://schemas.openxmlformats.org/drawingml/2006/main" xmlns:r="http://schemas.openxmlformats.org/officeDocument/2006/relationships" xmlns:p="http://schemas.openxmlformats.org/presentationml/2006/main" showMasterSp="0" showMasterPhAnim="0">
+  <p:cSld>
+    <p:spTree>
+      <p:nvGrpSpPr>
+        <p:cNvPr id="1" name="Shape 234"/>
+        <p:cNvGrpSpPr/>
+        <p:nvPr/>
+      </p:nvGrpSpPr>
+      <p:grpSpPr>
+        <a:xfrm>
+          <a:off x="0" y="0"/>
+          <a:ext cx="0" cy="0"/>
+          <a:chOff x="0" y="0"/>
+          <a:chExt cx="0" cy="0"/>
+        </a:xfrm>
+      </p:grpSpPr>
+      <p:sp>
+        <p:nvSpPr>
+          <p:cNvPr id="235" name="Google Shape;235;p12:notes"/>
+          <p:cNvSpPr txBox="1">
+            <a:spLocks noGrp="1"/>
+          </p:cNvSpPr>
+          <p:nvPr>
+            <p:ph type="body" idx="1"/>
+          </p:nvPr>
+        </p:nvSpPr>
+        <p:spPr>
+          <a:xfrm>
+            <a:off x="685800" y="4343400"/>
+            <a:ext cx="5486400" cy="4114800"/>
+          </a:xfrm>
+          <a:prstGeom prst="rect">
+            <a:avLst/>
+          </a:prstGeom>
+        </p:spPr>
+        <p:txBody>
+          <a:bodyPr spcFirstLastPara="1" wrap="square" lIns="91425" tIns="91425" rIns="91425" bIns="91425" anchor="t" anchorCtr="0">
+            <a:noAutofit/>
+          </a:bodyPr>
+          <a:lstStyle/>
+          <a:p>
+            <a:pPr marL="0" lvl="0" indent="0" algn="l" rtl="0">
+              <a:spcBef>
+                <a:spcPts val="0"/>
+              </a:spcBef>
+              <a:spcAft>
+                <a:spcPts val="0"/>
+              </a:spcAft>
+              <a:buNone/>
+            </a:pPr>
+            <a:endParaRPr/>
+          </a:p>
+        </p:txBody>
+      </p:sp>
+      <p:sp>
+        <p:nvSpPr>
+          <p:cNvPr id="236" name="Google Shape;236;p12:notes"/>
+          <p:cNvSpPr>
+            <a:spLocks noGrp="1" noRot="1" noChangeAspect="1"/>
+          </p:cNvSpPr>
+          <p:nvPr>
+            <p:ph type="sldImg" idx="2"/>
+          </p:nvPr>
+        </p:nvSpPr>
+        <p:spPr>
+          <a:xfrm>
+            <a:off x="381000" y="685800"/>
+            <a:ext cx="6096000" cy="3429000"/>
+          </a:xfrm>
+          <a:custGeom>
+            <a:avLst/>
+            <a:gdLst/>
+            <a:ahLst/>
+            <a:cxnLst/>
+            <a:rect l="l" t="t" r="r" b="b"/>
+            <a:pathLst>
+              <a:path w="120000" h="120000" extrusionOk="0">
+                <a:moveTo>
+                  <a:pt x="0" y="0"/>
+                </a:moveTo>
+                <a:lnTo>
+                  <a:pt x="120000" y="0"/>
+                </a:lnTo>
+                <a:lnTo>
+                  <a:pt x="120000" y="120000"/>
+                </a:lnTo>
+                <a:lnTo>
+                  <a:pt x="0" y="120000"/>
+                </a:lnTo>
+                <a:close/>
+              </a:path>
+            </a:pathLst>
+          </a:custGeom>
+        </p:spPr>
+      </p:sp>
+    </p:spTree>
+    <p:extLst>
+      <p:ext uri="{BB962C8B-B14F-4D97-AF65-F5344CB8AC3E}">
+        <p14:creationId xmlns:p14="http://schemas.microsoft.com/office/powerpoint/2010/main" val="2738659245"/>
+      </p:ext>
+    </p:extLst>
+  </p:cSld>
+  <p:clrMapOvr>
+    <a:masterClrMapping/>
+  </p:clrMapOvr>
+</p:notes>
+</file>
+
+<file path=ppt/notesSlides/notesSlide14.xml><?xml version="1.0" encoding="utf-8"?>
 <p:notes xmlns:a="http://schemas.openxmlformats.org/drawingml/2006/main" xmlns:r="http://schemas.openxmlformats.org/officeDocument/2006/relationships" xmlns:p="http://schemas.openxmlformats.org/presentationml/2006/main" showMasterSp="0" showMasterPhAnim="0">
   <p:cSld>
     <p:spTree>
@@ -1219,8 +1329,8 @@
         </p:nvSpPr>
         <p:spPr>
           <a:xfrm>
-            <a:off x="1143225" y="685800"/>
-            <a:ext cx="4572225" cy="3429000"/>
+            <a:off x="381000" y="685800"/>
+            <a:ext cx="6096000" cy="3429000"/>
           </a:xfrm>
           <a:custGeom>
             <a:avLst/>
@@ -12759,7 +12869,7 @@
         <p:spPr>
           <a:xfrm>
             <a:off x="571500" y="982563"/>
-            <a:ext cx="11601450" cy="590550"/>
+            <a:ext cx="11601450" cy="600164"/>
           </a:xfrm>
           <a:prstGeom prst="rect">
             <a:avLst/>
@@ -12785,7 +12895,7 @@
               <a:buNone/>
             </a:pPr>
             <a:r>
-              <a:rPr lang="en-US" sz="3900" b="0" i="0" u="none" strike="noStrike" cap="none">
+              <a:rPr lang="en-US" sz="3900" b="0" i="0" u="none" strike="noStrike" cap="none" dirty="0" err="1">
                 <a:solidFill>
                   <a:srgbClr val="F5F5F5"/>
                 </a:solidFill>
@@ -12794,21 +12904,33 @@
                 <a:cs typeface="Urbanist Medium"/>
                 <a:sym typeface="Urbanist Medium"/>
               </a:rPr>
-              <a:t>Tecnologia de </a:t>
+              <a:t>Principais</a:t>
             </a:r>
             <a:r>
-              <a:rPr lang="en-US" sz="3900" b="0" i="0" u="none" strike="noStrike" cap="none">
-                <a:solidFill>
-                  <a:srgbClr val="4C6EF5"/>
+              <a:rPr lang="en-US" sz="3900" b="0" i="0" u="none" strike="noStrike" cap="none" dirty="0">
+                <a:solidFill>
+                  <a:srgbClr val="F5F5F5"/>
                 </a:solidFill>
                 <a:latin typeface="Urbanist Medium"/>
                 <a:ea typeface="Urbanist Medium"/>
                 <a:cs typeface="Urbanist Medium"/>
                 <a:sym typeface="Urbanist Medium"/>
               </a:rPr>
-              <a:t>Ponta</a:t>
+              <a:t> </a:t>
             </a:r>
-            <a:endParaRPr/>
+            <a:r>
+              <a:rPr lang="en-US" sz="3900" b="0" i="0" u="none" strike="noStrike" cap="none" dirty="0" err="1">
+                <a:solidFill>
+                  <a:srgbClr val="4C6EF5"/>
+                </a:solidFill>
+                <a:latin typeface="Urbanist Medium"/>
+                <a:ea typeface="Urbanist Medium"/>
+                <a:cs typeface="Urbanist Medium"/>
+                <a:sym typeface="Urbanist Medium"/>
+              </a:rPr>
+              <a:t>Tecnologias</a:t>
+            </a:r>
+            <a:endParaRPr dirty="0"/>
           </a:p>
         </p:txBody>
       </p:sp>
@@ -13722,8 +13844,8 @@
         </p:nvSpPr>
         <p:spPr>
           <a:xfrm>
-            <a:off x="2820590" y="2409825"/>
-            <a:ext cx="6550818" cy="1143000"/>
+            <a:off x="-636987" y="398711"/>
+            <a:ext cx="5180411" cy="830997"/>
           </a:xfrm>
           <a:prstGeom prst="rect">
             <a:avLst/>
@@ -13749,18 +13871,46 @@
               <a:buNone/>
             </a:pPr>
             <a:r>
-              <a:rPr lang="en-US" sz="7500" b="1" i="0" u="none" strike="noStrike" cap="none">
-                <a:solidFill>
-                  <a:srgbClr val="3B5BDB"/>
+              <a:rPr lang="en-US" sz="5400" b="1" dirty="0" err="1">
+                <a:solidFill>
+                  <a:schemeClr val="bg1"/>
                 </a:solidFill>
                 <a:latin typeface="Urbanist"/>
                 <a:ea typeface="Urbanist"/>
                 <a:cs typeface="Urbanist"/>
                 <a:sym typeface="Urbanist"/>
               </a:rPr>
-              <a:t>Dúvidas?</a:t>
+              <a:t>Uso</a:t>
             </a:r>
-            <a:endParaRPr/>
+            <a:r>
+              <a:rPr lang="en-US" sz="5400" b="1" dirty="0">
+                <a:solidFill>
+                  <a:schemeClr val="bg1"/>
+                </a:solidFill>
+                <a:latin typeface="Urbanist"/>
+                <a:ea typeface="Urbanist"/>
+                <a:cs typeface="Urbanist"/>
+                <a:sym typeface="Urbanist"/>
+              </a:rPr>
+              <a:t> de </a:t>
+            </a:r>
+            <a:r>
+              <a:rPr lang="en-US" sz="5400" b="1" dirty="0">
+                <a:solidFill>
+                  <a:srgbClr val="3B5BDB"/>
+                </a:solidFill>
+                <a:latin typeface="Urbanist"/>
+                <a:ea typeface="Urbanist"/>
+                <a:cs typeface="Urbanist"/>
+                <a:sym typeface="Urbanist"/>
+              </a:rPr>
+              <a:t>IA</a:t>
+            </a:r>
+            <a:endParaRPr lang="en-US" sz="1000" dirty="0">
+              <a:solidFill>
+                <a:srgbClr val="3B5BDB"/>
+              </a:solidFill>
+            </a:endParaRPr>
           </a:p>
         </p:txBody>
       </p:sp>
@@ -13772,8 +13922,8 @@
         </p:nvSpPr>
         <p:spPr>
           <a:xfrm>
-            <a:off x="2976562" y="3743325"/>
-            <a:ext cx="6238875" cy="400050"/>
+            <a:off x="100016" y="2613416"/>
+            <a:ext cx="10650139" cy="615553"/>
           </a:xfrm>
           <a:prstGeom prst="rect">
             <a:avLst/>
@@ -13787,33 +13937,52 @@
           <a:bodyPr spcFirstLastPara="1" wrap="square" lIns="0" tIns="0" rIns="0" bIns="0" anchor="t" anchorCtr="0">
             <a:spAutoFit/>
           </a:bodyPr>
-          <a:lstStyle/>
+          <a:lstStyle>
+            <a:defPPr marR="0" lvl="0" algn="l" rtl="0">
+              <a:lnSpc>
+                <a:spcPct val="100000"/>
+              </a:lnSpc>
+              <a:spcBef>
+                <a:spcPts val="0"/>
+              </a:spcBef>
+              <a:spcAft>
+                <a:spcPts val="0"/>
+              </a:spcAft>
+            </a:defPPr>
+            <a:lvl1pPr marL="0" indent="0" algn="ctr">
+              <a:buNone/>
+              <a:defRPr sz="5400" b="1">
+                <a:solidFill>
+                  <a:schemeClr val="bg1"/>
+                </a:solidFill>
+                <a:latin typeface="Urbanist"/>
+                <a:ea typeface="Urbanist"/>
+                <a:cs typeface="Urbanist"/>
+              </a:defRPr>
+            </a:lvl1pPr>
+          </a:lstStyle>
           <a:p>
-            <a:pPr marL="0" marR="0" lvl="0" indent="0" algn="ctr" rtl="0">
-              <a:lnSpc>
-                <a:spcPct val="150000"/>
-              </a:lnSpc>
-              <a:spcBef>
-                <a:spcPts val="0"/>
-              </a:spcBef>
-              <a:spcAft>
-                <a:spcPts val="0"/>
-              </a:spcAft>
-              <a:buNone/>
-            </a:pPr>
             <a:r>
-              <a:rPr lang="en-US" sz="2100" b="0" i="0" u="none" strike="noStrike" cap="none">
-                <a:solidFill>
-                  <a:srgbClr val="4C6EF5"/>
-                </a:solidFill>
-                <a:latin typeface="Urbanist Medium"/>
-                <a:ea typeface="Urbanist Medium"/>
-                <a:cs typeface="Urbanist Medium"/>
-                <a:sym typeface="Urbanist Medium"/>
+              <a:rPr lang="pt-BR" sz="4000" dirty="0">
+                <a:solidFill>
+                  <a:srgbClr val="3B5BDB"/>
+                </a:solidFill>
               </a:rPr>
-              <a:t>MANACTIONS: O controle que sua empresa merece.</a:t>
+              <a:t>FRONTEND</a:t>
             </a:r>
-            <a:endParaRPr/>
+            <a:r>
+              <a:rPr lang="pt-BR" sz="4000" dirty="0"/>
+              <a:t> — 4 Etapas (</a:t>
+            </a:r>
+            <a:r>
+              <a:rPr lang="pt-BR" sz="4000" dirty="0" err="1"/>
+              <a:t>Lovable</a:t>
+            </a:r>
+            <a:r>
+              <a:rPr lang="pt-BR" sz="4000" dirty="0"/>
+              <a:t> + Cursor)</a:t>
+            </a:r>
+            <a:endParaRPr sz="4000" dirty="0"/>
           </a:p>
         </p:txBody>
       </p:sp>
@@ -13825,8 +13994,8 @@
         </p:nvSpPr>
         <p:spPr>
           <a:xfrm>
-            <a:off x="2976562" y="4714875"/>
-            <a:ext cx="6238875" cy="314325"/>
+            <a:off x="590549" y="1229708"/>
+            <a:ext cx="8572503" cy="1142620"/>
           </a:xfrm>
           <a:prstGeom prst="rect">
             <a:avLst/>
@@ -13842,7 +14011,7 @@
           </a:bodyPr>
           <a:lstStyle/>
           <a:p>
-            <a:pPr marL="0" marR="0" lvl="0" indent="0" algn="ctr" rtl="0">
+            <a:pPr marL="0" marR="0" lvl="0" indent="0" rtl="0">
               <a:lnSpc>
                 <a:spcPct val="150000"/>
               </a:lnSpc>
@@ -13855,7 +14024,7 @@
               <a:buNone/>
             </a:pPr>
             <a:r>
-              <a:rPr lang="en-US" sz="1650" b="0" i="0" u="none" strike="noStrike" cap="none">
+              <a:rPr lang="en-US" sz="1650" dirty="0">
                 <a:solidFill>
                   <a:srgbClr val="DAFFDE"/>
                 </a:solidFill>
@@ -13864,9 +14033,697 @@
                 <a:cs typeface="Urbanist"/>
                 <a:sym typeface="Urbanist"/>
               </a:rPr>
-              <a:t>manactions.vercel.app</a:t>
+              <a:t>Prompt </a:t>
             </a:r>
-            <a:endParaRPr/>
+            <a:r>
+              <a:rPr lang="en-US" sz="1650" dirty="0" err="1">
+                <a:solidFill>
+                  <a:srgbClr val="DAFFDE"/>
+                </a:solidFill>
+                <a:latin typeface="Urbanist"/>
+                <a:ea typeface="Urbanist"/>
+                <a:cs typeface="Urbanist"/>
+                <a:sym typeface="Urbanist"/>
+              </a:rPr>
+              <a:t>gerados</a:t>
+            </a:r>
+            <a:r>
+              <a:rPr lang="en-US" sz="1650" dirty="0">
+                <a:solidFill>
+                  <a:srgbClr val="DAFFDE"/>
+                </a:solidFill>
+                <a:latin typeface="Urbanist"/>
+                <a:ea typeface="Urbanist"/>
+                <a:cs typeface="Urbanist"/>
+                <a:sym typeface="Urbanist"/>
+              </a:rPr>
+              <a:t> </a:t>
+            </a:r>
+            <a:r>
+              <a:rPr lang="en-US" sz="1650" dirty="0" err="1">
+                <a:solidFill>
+                  <a:srgbClr val="DAFFDE"/>
+                </a:solidFill>
+                <a:latin typeface="Urbanist"/>
+                <a:ea typeface="Urbanist"/>
+                <a:cs typeface="Urbanist"/>
+                <a:sym typeface="Urbanist"/>
+              </a:rPr>
+              <a:t>Através</a:t>
+            </a:r>
+            <a:r>
+              <a:rPr lang="en-US" sz="1650" dirty="0">
+                <a:solidFill>
+                  <a:srgbClr val="DAFFDE"/>
+                </a:solidFill>
+                <a:latin typeface="Urbanist"/>
+                <a:ea typeface="Urbanist"/>
+                <a:cs typeface="Urbanist"/>
+                <a:sym typeface="Urbanist"/>
+              </a:rPr>
+              <a:t> do Claude AI </a:t>
+            </a:r>
+          </a:p>
+          <a:p>
+            <a:pPr marL="0" marR="0" lvl="0" indent="0" rtl="0">
+              <a:lnSpc>
+                <a:spcPct val="150000"/>
+              </a:lnSpc>
+              <a:spcBef>
+                <a:spcPts val="0"/>
+              </a:spcBef>
+              <a:spcAft>
+                <a:spcPts val="0"/>
+              </a:spcAft>
+              <a:buNone/>
+            </a:pPr>
+            <a:r>
+              <a:rPr lang="en-US" sz="1650" dirty="0">
+                <a:solidFill>
+                  <a:srgbClr val="DAFFDE"/>
+                </a:solidFill>
+                <a:latin typeface="Urbanist"/>
+                <a:ea typeface="Urbanist"/>
+                <a:cs typeface="Urbanist"/>
+                <a:sym typeface="Urbanist"/>
+              </a:rPr>
+              <a:t>– </a:t>
+            </a:r>
+            <a:r>
+              <a:rPr lang="en-US" sz="1650" dirty="0" err="1">
+                <a:solidFill>
+                  <a:srgbClr val="DAFFDE"/>
+                </a:solidFill>
+                <a:latin typeface="Urbanist"/>
+                <a:ea typeface="Urbanist"/>
+                <a:cs typeface="Urbanist"/>
+                <a:sym typeface="Urbanist"/>
+              </a:rPr>
+              <a:t>Etapas</a:t>
+            </a:r>
+            <a:r>
+              <a:rPr lang="en-US" sz="1650" dirty="0">
+                <a:solidFill>
+                  <a:srgbClr val="DAFFDE"/>
+                </a:solidFill>
+                <a:latin typeface="Urbanist"/>
+                <a:ea typeface="Urbanist"/>
+                <a:cs typeface="Urbanist"/>
+                <a:sym typeface="Urbanist"/>
+              </a:rPr>
+              <a:t> </a:t>
+            </a:r>
+            <a:r>
+              <a:rPr lang="en-US" sz="1650" dirty="0" err="1">
+                <a:solidFill>
+                  <a:srgbClr val="DAFFDE"/>
+                </a:solidFill>
+                <a:latin typeface="Urbanist"/>
+                <a:ea typeface="Urbanist"/>
+                <a:cs typeface="Urbanist"/>
+                <a:sym typeface="Urbanist"/>
+              </a:rPr>
+              <a:t>sequenciadas</a:t>
+            </a:r>
+            <a:r>
+              <a:rPr lang="en-US" sz="1650" dirty="0">
+                <a:solidFill>
+                  <a:srgbClr val="DAFFDE"/>
+                </a:solidFill>
+                <a:latin typeface="Urbanist"/>
+                <a:ea typeface="Urbanist"/>
+                <a:cs typeface="Urbanist"/>
+                <a:sym typeface="Urbanist"/>
+              </a:rPr>
+              <a:t> e </a:t>
+            </a:r>
+            <a:r>
+              <a:rPr lang="en-US" sz="1650" dirty="0" err="1">
+                <a:solidFill>
+                  <a:srgbClr val="DAFFDE"/>
+                </a:solidFill>
+                <a:latin typeface="Urbanist"/>
+                <a:ea typeface="Urbanist"/>
+                <a:cs typeface="Urbanist"/>
+                <a:sym typeface="Urbanist"/>
+              </a:rPr>
+              <a:t>validadas</a:t>
+            </a:r>
+            <a:r>
+              <a:rPr lang="en-US" sz="1650" dirty="0">
+                <a:solidFill>
+                  <a:srgbClr val="DAFFDE"/>
+                </a:solidFill>
+                <a:latin typeface="Urbanist"/>
+                <a:ea typeface="Urbanist"/>
+                <a:cs typeface="Urbanist"/>
+                <a:sym typeface="Urbanist"/>
+              </a:rPr>
+              <a:t> antes da </a:t>
+            </a:r>
+            <a:r>
+              <a:rPr lang="en-US" sz="1650" dirty="0" err="1">
+                <a:solidFill>
+                  <a:srgbClr val="DAFFDE"/>
+                </a:solidFill>
+                <a:latin typeface="Urbanist"/>
+                <a:ea typeface="Urbanist"/>
+                <a:cs typeface="Urbanist"/>
+                <a:sym typeface="Urbanist"/>
+              </a:rPr>
+              <a:t>próxima</a:t>
+            </a:r>
+            <a:r>
+              <a:rPr lang="en-US" sz="1650" dirty="0">
+                <a:solidFill>
+                  <a:srgbClr val="DAFFDE"/>
+                </a:solidFill>
+                <a:latin typeface="Urbanist"/>
+                <a:ea typeface="Urbanist"/>
+                <a:cs typeface="Urbanist"/>
+                <a:sym typeface="Urbanist"/>
+              </a:rPr>
+              <a:t> </a:t>
+            </a:r>
+          </a:p>
+          <a:p>
+            <a:pPr marL="0" marR="0" lvl="0" indent="0" rtl="0">
+              <a:lnSpc>
+                <a:spcPct val="150000"/>
+              </a:lnSpc>
+              <a:spcBef>
+                <a:spcPts val="0"/>
+              </a:spcBef>
+              <a:spcAft>
+                <a:spcPts val="0"/>
+              </a:spcAft>
+              <a:buNone/>
+            </a:pPr>
+            <a:r>
+              <a:rPr lang="en-US" sz="1650" dirty="0">
+                <a:solidFill>
+                  <a:srgbClr val="DAFFDE"/>
+                </a:solidFill>
+                <a:latin typeface="Urbanist"/>
+                <a:ea typeface="Urbanist"/>
+                <a:cs typeface="Urbanist"/>
+                <a:sym typeface="Urbanist"/>
+              </a:rPr>
+              <a:t>-  Sem </a:t>
+            </a:r>
+            <a:r>
+              <a:rPr lang="en-US" sz="1650" dirty="0" err="1">
+                <a:solidFill>
+                  <a:srgbClr val="DAFFDE"/>
+                </a:solidFill>
+                <a:latin typeface="Urbanist"/>
+                <a:ea typeface="Urbanist"/>
+                <a:cs typeface="Urbanist"/>
+                <a:sym typeface="Urbanist"/>
+              </a:rPr>
+              <a:t>sobrecarga</a:t>
+            </a:r>
+            <a:r>
+              <a:rPr lang="en-US" sz="1650" dirty="0">
+                <a:solidFill>
+                  <a:srgbClr val="DAFFDE"/>
+                </a:solidFill>
+                <a:latin typeface="Urbanist"/>
+                <a:ea typeface="Urbanist"/>
+                <a:cs typeface="Urbanist"/>
+                <a:sym typeface="Urbanist"/>
+              </a:rPr>
+              <a:t> e </a:t>
+            </a:r>
+            <a:r>
+              <a:rPr lang="en-US" sz="1650" dirty="0" err="1">
+                <a:solidFill>
+                  <a:srgbClr val="DAFFDE"/>
+                </a:solidFill>
+                <a:latin typeface="Urbanist"/>
+                <a:ea typeface="Urbanist"/>
+                <a:cs typeface="Urbanist"/>
+                <a:sym typeface="Urbanist"/>
+              </a:rPr>
+              <a:t>geração</a:t>
+            </a:r>
+            <a:r>
+              <a:rPr lang="en-US" sz="1650" dirty="0">
+                <a:solidFill>
+                  <a:srgbClr val="DAFFDE"/>
+                </a:solidFill>
+                <a:latin typeface="Urbanist"/>
+                <a:ea typeface="Urbanist"/>
+                <a:cs typeface="Urbanist"/>
+                <a:sym typeface="Urbanist"/>
+              </a:rPr>
+              <a:t> de </a:t>
+            </a:r>
+            <a:r>
+              <a:rPr lang="en-US" sz="1650" dirty="0" err="1">
+                <a:solidFill>
+                  <a:srgbClr val="DAFFDE"/>
+                </a:solidFill>
+                <a:latin typeface="Urbanist"/>
+                <a:ea typeface="Urbanist"/>
+                <a:cs typeface="Urbanist"/>
+                <a:sym typeface="Urbanist"/>
+              </a:rPr>
+              <a:t>erros</a:t>
+            </a:r>
+            <a:endParaRPr dirty="0"/>
+          </a:p>
+        </p:txBody>
+      </p:sp>
+      <p:sp>
+        <p:nvSpPr>
+          <p:cNvPr id="7" name="Content Placeholder 2">
+            <a:extLst>
+              <a:ext uri="{FF2B5EF4-FFF2-40B4-BE49-F238E27FC236}">
+                <a16:creationId xmlns:a16="http://schemas.microsoft.com/office/drawing/2014/main" id="{2B085614-C47B-45FD-A217-2B97D9074B56}"/>
+              </a:ext>
+            </a:extLst>
+          </p:cNvPr>
+          <p:cNvSpPr txBox="1">
+            <a:spLocks/>
+          </p:cNvSpPr>
+          <p:nvPr/>
+        </p:nvSpPr>
+        <p:spPr>
+          <a:xfrm>
+            <a:off x="590549" y="3390815"/>
+            <a:ext cx="9753601" cy="2954655"/>
+          </a:xfrm>
+          <a:prstGeom prst="rect">
+            <a:avLst/>
+          </a:prstGeom>
+          <a:noFill/>
+          <a:ln>
+            <a:noFill/>
+          </a:ln>
+        </p:spPr>
+        <p:txBody>
+          <a:bodyPr spcFirstLastPara="1" wrap="square" lIns="0" tIns="0" rIns="0" bIns="0" anchor="t" anchorCtr="0">
+            <a:spAutoFit/>
+          </a:bodyPr>
+          <a:lstStyle>
+            <a:defPPr marR="0" lvl="0" algn="l" rtl="0">
+              <a:lnSpc>
+                <a:spcPct val="100000"/>
+              </a:lnSpc>
+              <a:spcBef>
+                <a:spcPts val="0"/>
+              </a:spcBef>
+              <a:spcAft>
+                <a:spcPts val="0"/>
+              </a:spcAft>
+            </a:defPPr>
+            <a:lvl1pPr marL="0" indent="0">
+              <a:lnSpc>
+                <a:spcPct val="150000"/>
+              </a:lnSpc>
+              <a:buNone/>
+              <a:defRPr sz="1650">
+                <a:solidFill>
+                  <a:srgbClr val="DAFFDE"/>
+                </a:solidFill>
+                <a:latin typeface="Urbanist"/>
+                <a:ea typeface="Urbanist"/>
+                <a:cs typeface="Urbanist"/>
+              </a:defRPr>
+            </a:lvl1pPr>
+            <a:lvl2pPr marR="0" lvl="1" algn="l" rtl="0">
+              <a:lnSpc>
+                <a:spcPct val="100000"/>
+              </a:lnSpc>
+              <a:spcBef>
+                <a:spcPts val="0"/>
+              </a:spcBef>
+              <a:spcAft>
+                <a:spcPts val="0"/>
+              </a:spcAft>
+              <a:buClr>
+                <a:srgbClr val="000000"/>
+              </a:buClr>
+              <a:buFont typeface="Arial"/>
+              <a:defRPr sz="1400" b="0" i="0" u="none" strike="noStrike" cap="none">
+                <a:solidFill>
+                  <a:srgbClr val="000000"/>
+                </a:solidFill>
+                <a:latin typeface="Arial"/>
+                <a:ea typeface="Arial"/>
+                <a:cs typeface="Arial"/>
+                <a:sym typeface="Arial"/>
+              </a:defRPr>
+            </a:lvl2pPr>
+            <a:lvl3pPr marR="0" lvl="2" algn="l" rtl="0">
+              <a:lnSpc>
+                <a:spcPct val="100000"/>
+              </a:lnSpc>
+              <a:spcBef>
+                <a:spcPts val="0"/>
+              </a:spcBef>
+              <a:spcAft>
+                <a:spcPts val="0"/>
+              </a:spcAft>
+              <a:buClr>
+                <a:srgbClr val="000000"/>
+              </a:buClr>
+              <a:buFont typeface="Arial"/>
+              <a:defRPr sz="1400" b="0" i="0" u="none" strike="noStrike" cap="none">
+                <a:solidFill>
+                  <a:srgbClr val="000000"/>
+                </a:solidFill>
+                <a:latin typeface="Arial"/>
+                <a:ea typeface="Arial"/>
+                <a:cs typeface="Arial"/>
+                <a:sym typeface="Arial"/>
+              </a:defRPr>
+            </a:lvl3pPr>
+            <a:lvl4pPr marR="0" lvl="3" algn="l" rtl="0">
+              <a:lnSpc>
+                <a:spcPct val="100000"/>
+              </a:lnSpc>
+              <a:spcBef>
+                <a:spcPts val="0"/>
+              </a:spcBef>
+              <a:spcAft>
+                <a:spcPts val="0"/>
+              </a:spcAft>
+              <a:buClr>
+                <a:srgbClr val="000000"/>
+              </a:buClr>
+              <a:buFont typeface="Arial"/>
+              <a:defRPr sz="1400" b="0" i="0" u="none" strike="noStrike" cap="none">
+                <a:solidFill>
+                  <a:srgbClr val="000000"/>
+                </a:solidFill>
+                <a:latin typeface="Arial"/>
+                <a:ea typeface="Arial"/>
+                <a:cs typeface="Arial"/>
+                <a:sym typeface="Arial"/>
+              </a:defRPr>
+            </a:lvl4pPr>
+            <a:lvl5pPr marR="0" lvl="4" algn="l" rtl="0">
+              <a:lnSpc>
+                <a:spcPct val="100000"/>
+              </a:lnSpc>
+              <a:spcBef>
+                <a:spcPts val="0"/>
+              </a:spcBef>
+              <a:spcAft>
+                <a:spcPts val="0"/>
+              </a:spcAft>
+              <a:buClr>
+                <a:srgbClr val="000000"/>
+              </a:buClr>
+              <a:buFont typeface="Arial"/>
+              <a:defRPr sz="1400" b="0" i="0" u="none" strike="noStrike" cap="none">
+                <a:solidFill>
+                  <a:srgbClr val="000000"/>
+                </a:solidFill>
+                <a:latin typeface="Arial"/>
+                <a:ea typeface="Arial"/>
+                <a:cs typeface="Arial"/>
+                <a:sym typeface="Arial"/>
+              </a:defRPr>
+            </a:lvl5pPr>
+            <a:lvl6pPr marR="0" lvl="5" algn="l" rtl="0">
+              <a:lnSpc>
+                <a:spcPct val="100000"/>
+              </a:lnSpc>
+              <a:spcBef>
+                <a:spcPts val="0"/>
+              </a:spcBef>
+              <a:spcAft>
+                <a:spcPts val="0"/>
+              </a:spcAft>
+              <a:buClr>
+                <a:srgbClr val="000000"/>
+              </a:buClr>
+              <a:buFont typeface="Arial"/>
+              <a:defRPr sz="1400" b="0" i="0" u="none" strike="noStrike" cap="none">
+                <a:solidFill>
+                  <a:srgbClr val="000000"/>
+                </a:solidFill>
+                <a:latin typeface="Arial"/>
+                <a:ea typeface="Arial"/>
+                <a:cs typeface="Arial"/>
+                <a:sym typeface="Arial"/>
+              </a:defRPr>
+            </a:lvl6pPr>
+            <a:lvl7pPr marR="0" lvl="6" algn="l" rtl="0">
+              <a:lnSpc>
+                <a:spcPct val="100000"/>
+              </a:lnSpc>
+              <a:spcBef>
+                <a:spcPts val="0"/>
+              </a:spcBef>
+              <a:spcAft>
+                <a:spcPts val="0"/>
+              </a:spcAft>
+              <a:buClr>
+                <a:srgbClr val="000000"/>
+              </a:buClr>
+              <a:buFont typeface="Arial"/>
+              <a:defRPr sz="1400" b="0" i="0" u="none" strike="noStrike" cap="none">
+                <a:solidFill>
+                  <a:srgbClr val="000000"/>
+                </a:solidFill>
+                <a:latin typeface="Arial"/>
+                <a:ea typeface="Arial"/>
+                <a:cs typeface="Arial"/>
+                <a:sym typeface="Arial"/>
+              </a:defRPr>
+            </a:lvl7pPr>
+            <a:lvl8pPr marR="0" lvl="7" algn="l" rtl="0">
+              <a:lnSpc>
+                <a:spcPct val="100000"/>
+              </a:lnSpc>
+              <a:spcBef>
+                <a:spcPts val="0"/>
+              </a:spcBef>
+              <a:spcAft>
+                <a:spcPts val="0"/>
+              </a:spcAft>
+              <a:buClr>
+                <a:srgbClr val="000000"/>
+              </a:buClr>
+              <a:buFont typeface="Arial"/>
+              <a:defRPr sz="1400" b="0" i="0" u="none" strike="noStrike" cap="none">
+                <a:solidFill>
+                  <a:srgbClr val="000000"/>
+                </a:solidFill>
+                <a:latin typeface="Arial"/>
+                <a:ea typeface="Arial"/>
+                <a:cs typeface="Arial"/>
+                <a:sym typeface="Arial"/>
+              </a:defRPr>
+            </a:lvl8pPr>
+            <a:lvl9pPr marR="0" lvl="8" algn="l" rtl="0">
+              <a:lnSpc>
+                <a:spcPct val="100000"/>
+              </a:lnSpc>
+              <a:spcBef>
+                <a:spcPts val="0"/>
+              </a:spcBef>
+              <a:spcAft>
+                <a:spcPts val="0"/>
+              </a:spcAft>
+              <a:buClr>
+                <a:srgbClr val="000000"/>
+              </a:buClr>
+              <a:buFont typeface="Arial"/>
+              <a:defRPr sz="1400" b="0" i="0" u="none" strike="noStrike" cap="none">
+                <a:solidFill>
+                  <a:srgbClr val="000000"/>
+                </a:solidFill>
+                <a:latin typeface="Arial"/>
+                <a:ea typeface="Arial"/>
+                <a:cs typeface="Arial"/>
+                <a:sym typeface="Arial"/>
+              </a:defRPr>
+            </a:lvl9pPr>
+          </a:lstStyle>
+          <a:p>
+            <a:r>
+              <a:rPr lang="pt-BR" sz="1600" dirty="0">
+                <a:solidFill>
+                  <a:srgbClr val="3B5BDB"/>
+                </a:solidFill>
+              </a:rPr>
+              <a:t>01</a:t>
+            </a:r>
+            <a:r>
+              <a:rPr lang="pt-BR" sz="1600" dirty="0"/>
+              <a:t> — Estrutura Base, </a:t>
+            </a:r>
+            <a:r>
+              <a:rPr lang="pt-BR" sz="1600" dirty="0" err="1"/>
+              <a:t>Auth</a:t>
+            </a:r>
+            <a:r>
+              <a:rPr lang="pt-BR" sz="1600" dirty="0"/>
+              <a:t> e Layout Global</a:t>
+            </a:r>
+            <a:br>
+              <a:rPr lang="pt-BR" sz="1600" dirty="0"/>
+            </a:br>
+            <a:r>
+              <a:rPr lang="pt-BR" sz="1600" dirty="0"/>
+              <a:t>Login (</a:t>
+            </a:r>
+            <a:r>
+              <a:rPr lang="pt-BR" sz="1600" dirty="0" err="1"/>
+              <a:t>Supabase</a:t>
+            </a:r>
+            <a:r>
+              <a:rPr lang="pt-BR" sz="1600" dirty="0"/>
+              <a:t> </a:t>
+            </a:r>
+            <a:r>
+              <a:rPr lang="pt-BR" sz="1600" dirty="0" err="1"/>
+              <a:t>Auth</a:t>
+            </a:r>
+            <a:r>
+              <a:rPr lang="pt-BR" sz="1600" dirty="0"/>
+              <a:t>), </a:t>
+            </a:r>
+            <a:r>
+              <a:rPr lang="pt-BR" sz="1600" dirty="0" err="1"/>
+              <a:t>sidebar</a:t>
+            </a:r>
+            <a:r>
+              <a:rPr lang="pt-BR" sz="1600" dirty="0"/>
+              <a:t>, </a:t>
+            </a:r>
+            <a:r>
+              <a:rPr lang="pt-BR" sz="1600" dirty="0" err="1"/>
+              <a:t>topbar</a:t>
+            </a:r>
+            <a:r>
+              <a:rPr lang="pt-BR" sz="1600" dirty="0"/>
+              <a:t>, dashboard e </a:t>
+            </a:r>
+            <a:r>
+              <a:rPr lang="pt-BR" sz="1600" dirty="0" err="1"/>
+              <a:t>mocks</a:t>
+            </a:r>
+            <a:r>
+              <a:rPr lang="pt-BR" sz="1600" dirty="0"/>
+              <a:t> globais.</a:t>
+            </a:r>
+          </a:p>
+          <a:p>
+            <a:r>
+              <a:rPr lang="pt-BR" sz="1600" dirty="0">
+                <a:solidFill>
+                  <a:srgbClr val="3B5BDB"/>
+                </a:solidFill>
+              </a:rPr>
+              <a:t>02</a:t>
+            </a:r>
+            <a:r>
+              <a:rPr lang="pt-BR" sz="1600" dirty="0"/>
+              <a:t> — Módulo de Áreas</a:t>
+            </a:r>
+            <a:br>
+              <a:rPr lang="pt-BR" sz="1600" dirty="0"/>
+            </a:br>
+            <a:r>
+              <a:rPr lang="pt-BR" sz="1600" dirty="0"/>
+              <a:t>Listagem, detalhe (4 abas), formulário de criação e preview ao vivo.</a:t>
+            </a:r>
+          </a:p>
+          <a:p>
+            <a:r>
+              <a:rPr lang="pt-BR" sz="1600" dirty="0">
+                <a:solidFill>
+                  <a:srgbClr val="3B5BDB"/>
+                </a:solidFill>
+              </a:rPr>
+              <a:t>03</a:t>
+            </a:r>
+            <a:r>
+              <a:rPr lang="pt-BR" sz="1600" dirty="0"/>
+              <a:t> — Módulo de Demandas e Busca Global</a:t>
+            </a:r>
+            <a:br>
+              <a:rPr lang="pt-BR" sz="1600" dirty="0"/>
+            </a:br>
+            <a:r>
+              <a:rPr lang="pt-BR" sz="1600" dirty="0"/>
+              <a:t>Central de demandas, detalhe, </a:t>
+            </a:r>
+            <a:r>
+              <a:rPr lang="pt-BR" sz="1600" dirty="0" err="1"/>
+              <a:t>stepper</a:t>
+            </a:r>
+            <a:r>
+              <a:rPr lang="pt-BR" sz="1600" dirty="0"/>
+              <a:t> 'Nova Demanda' e modal </a:t>
+            </a:r>
+            <a:r>
+              <a:rPr lang="pt-BR" sz="1600" dirty="0" err="1"/>
+              <a:t>Cmd+K</a:t>
+            </a:r>
+            <a:r>
+              <a:rPr lang="pt-BR" sz="1600" dirty="0"/>
+              <a:t>.</a:t>
+            </a:r>
+          </a:p>
+          <a:p>
+            <a:r>
+              <a:rPr lang="pt-BR" sz="1600" dirty="0">
+                <a:solidFill>
+                  <a:srgbClr val="3B5BDB"/>
+                </a:solidFill>
+              </a:rPr>
+              <a:t>04</a:t>
+            </a:r>
+            <a:r>
+              <a:rPr lang="pt-BR" sz="1600" dirty="0"/>
+              <a:t> — Processos, Notificações e </a:t>
+            </a:r>
+            <a:r>
+              <a:rPr lang="pt-BR" sz="1600" dirty="0" err="1"/>
+              <a:t>Polish</a:t>
+            </a:r>
+            <a:r>
+              <a:rPr lang="pt-BR" sz="1600" dirty="0"/>
+              <a:t> Final</a:t>
+            </a:r>
+            <a:br>
+              <a:rPr lang="pt-BR" sz="1600" dirty="0"/>
+            </a:br>
+            <a:r>
+              <a:rPr lang="pt-BR" sz="1600" dirty="0"/>
+              <a:t>Processos, perfil, notificações </a:t>
+            </a:r>
+            <a:r>
+              <a:rPr lang="pt-BR" sz="1600" dirty="0" err="1"/>
+              <a:t>Realtime</a:t>
+            </a:r>
+            <a:r>
+              <a:rPr lang="pt-BR" sz="1600" dirty="0"/>
+              <a:t>, </a:t>
+            </a:r>
+            <a:r>
+              <a:rPr lang="pt-BR" sz="1600" dirty="0" err="1"/>
+              <a:t>dark</a:t>
+            </a:r>
+            <a:r>
+              <a:rPr lang="pt-BR" sz="1600" dirty="0"/>
+              <a:t> </a:t>
+            </a:r>
+            <a:r>
+              <a:rPr lang="pt-BR" sz="1600" dirty="0" err="1"/>
+              <a:t>mode</a:t>
+            </a:r>
+            <a:r>
+              <a:rPr lang="pt-BR" sz="1600" dirty="0"/>
+              <a:t> e responsividade.</a:t>
+            </a:r>
           </a:p>
         </p:txBody>
       </p:sp>
@@ -13879,6 +14736,807 @@
 </file>
 
 <file path=ppt/slides/slide13.xml><?xml version="1.0" encoding="utf-8"?>
+<p:sld xmlns:a="http://schemas.openxmlformats.org/drawingml/2006/main" xmlns:r="http://schemas.openxmlformats.org/officeDocument/2006/relationships" xmlns:p="http://schemas.openxmlformats.org/presentationml/2006/main">
+  <p:cSld>
+    <p:bg>
+      <p:bgPr>
+        <a:solidFill>
+          <a:srgbClr val="000000"/>
+        </a:solidFill>
+        <a:effectLst/>
+      </p:bgPr>
+    </p:bg>
+    <p:spTree>
+      <p:nvGrpSpPr>
+        <p:cNvPr id="1" name="Shape 237"/>
+        <p:cNvGrpSpPr/>
+        <p:nvPr/>
+      </p:nvGrpSpPr>
+      <p:grpSpPr>
+        <a:xfrm>
+          <a:off x="0" y="0"/>
+          <a:ext cx="0" cy="0"/>
+          <a:chOff x="0" y="0"/>
+          <a:chExt cx="0" cy="0"/>
+        </a:xfrm>
+      </p:grpSpPr>
+      <p:pic>
+        <p:nvPicPr>
+          <p:cNvPr id="238" name="Google Shape;238;p24" descr="image.png"/>
+          <p:cNvPicPr preferRelativeResize="0"/>
+          <p:nvPr/>
+        </p:nvPicPr>
+        <p:blipFill rotWithShape="1">
+          <a:blip r:embed="rId3">
+            <a:alphaModFix/>
+          </a:blip>
+          <a:srcRect/>
+          <a:stretch/>
+        </p:blipFill>
+        <p:spPr>
+          <a:xfrm>
+            <a:off x="-1" y="0"/>
+            <a:ext cx="12192000" cy="6858000"/>
+          </a:xfrm>
+          <a:prstGeom prst="rect">
+            <a:avLst/>
+          </a:prstGeom>
+          <a:noFill/>
+          <a:ln>
+            <a:noFill/>
+          </a:ln>
+        </p:spPr>
+      </p:pic>
+      <p:sp>
+        <p:nvSpPr>
+          <p:cNvPr id="239" name="Google Shape;239;p24"/>
+          <p:cNvSpPr txBox="1"/>
+          <p:nvPr/>
+        </p:nvSpPr>
+        <p:spPr>
+          <a:xfrm>
+            <a:off x="28575" y="394472"/>
+            <a:ext cx="3837387" cy="830997"/>
+          </a:xfrm>
+          <a:prstGeom prst="rect">
+            <a:avLst/>
+          </a:prstGeom>
+          <a:noFill/>
+          <a:ln>
+            <a:noFill/>
+          </a:ln>
+        </p:spPr>
+        <p:txBody>
+          <a:bodyPr spcFirstLastPara="1" wrap="square" lIns="0" tIns="0" rIns="0" bIns="0" anchor="t" anchorCtr="0">
+            <a:spAutoFit/>
+          </a:bodyPr>
+          <a:lstStyle/>
+          <a:p>
+            <a:pPr marL="0" marR="0" lvl="0" indent="0" algn="ctr" rtl="0">
+              <a:spcBef>
+                <a:spcPts val="0"/>
+              </a:spcBef>
+              <a:spcAft>
+                <a:spcPts val="0"/>
+              </a:spcAft>
+              <a:buNone/>
+            </a:pPr>
+            <a:r>
+              <a:rPr lang="en-US" sz="5400" b="1" dirty="0" err="1">
+                <a:solidFill>
+                  <a:schemeClr val="bg1"/>
+                </a:solidFill>
+                <a:latin typeface="Urbanist"/>
+                <a:ea typeface="Urbanist"/>
+                <a:cs typeface="Urbanist"/>
+                <a:sym typeface="Urbanist"/>
+              </a:rPr>
+              <a:t>Uso</a:t>
+            </a:r>
+            <a:r>
+              <a:rPr lang="en-US" sz="5400" b="1" dirty="0">
+                <a:solidFill>
+                  <a:schemeClr val="bg1"/>
+                </a:solidFill>
+                <a:latin typeface="Urbanist"/>
+                <a:ea typeface="Urbanist"/>
+                <a:cs typeface="Urbanist"/>
+                <a:sym typeface="Urbanist"/>
+              </a:rPr>
+              <a:t> de </a:t>
+            </a:r>
+            <a:r>
+              <a:rPr lang="en-US" sz="5400" b="1" dirty="0">
+                <a:solidFill>
+                  <a:srgbClr val="3B5BDB"/>
+                </a:solidFill>
+                <a:latin typeface="Urbanist"/>
+                <a:ea typeface="Urbanist"/>
+                <a:cs typeface="Urbanist"/>
+                <a:sym typeface="Urbanist"/>
+              </a:rPr>
+              <a:t>IA</a:t>
+            </a:r>
+            <a:endParaRPr lang="en-US" sz="1000" dirty="0"/>
+          </a:p>
+        </p:txBody>
+      </p:sp>
+      <p:sp>
+        <p:nvSpPr>
+          <p:cNvPr id="240" name="Google Shape;240;p24"/>
+          <p:cNvSpPr txBox="1"/>
+          <p:nvPr/>
+        </p:nvSpPr>
+        <p:spPr>
+          <a:xfrm>
+            <a:off x="-528638" y="1477060"/>
+            <a:ext cx="11215689" cy="615553"/>
+          </a:xfrm>
+          <a:prstGeom prst="rect">
+            <a:avLst/>
+          </a:prstGeom>
+          <a:noFill/>
+          <a:ln>
+            <a:noFill/>
+          </a:ln>
+        </p:spPr>
+        <p:txBody>
+          <a:bodyPr spcFirstLastPara="1" wrap="square" lIns="0" tIns="0" rIns="0" bIns="0" anchor="t" anchorCtr="0">
+            <a:spAutoFit/>
+          </a:bodyPr>
+          <a:lstStyle>
+            <a:defPPr marR="0" lvl="0" algn="l" rtl="0">
+              <a:lnSpc>
+                <a:spcPct val="100000"/>
+              </a:lnSpc>
+              <a:spcBef>
+                <a:spcPts val="0"/>
+              </a:spcBef>
+              <a:spcAft>
+                <a:spcPts val="0"/>
+              </a:spcAft>
+              <a:defRPr/>
+            </a:defPPr>
+            <a:lvl1pPr marL="0" indent="0" algn="ctr">
+              <a:buNone/>
+              <a:defRPr sz="4000" b="1">
+                <a:solidFill>
+                  <a:srgbClr val="3B5BDB"/>
+                </a:solidFill>
+                <a:latin typeface="Urbanist"/>
+                <a:ea typeface="Urbanist"/>
+                <a:cs typeface="Urbanist"/>
+              </a:defRPr>
+            </a:lvl1pPr>
+          </a:lstStyle>
+          <a:p>
+            <a:r>
+              <a:rPr lang="pt-BR" dirty="0"/>
+              <a:t>BACKEND </a:t>
+            </a:r>
+            <a:r>
+              <a:rPr lang="pt-BR" dirty="0">
+                <a:solidFill>
+                  <a:schemeClr val="bg1"/>
+                </a:solidFill>
+              </a:rPr>
+              <a:t>— 5 Etapas (Cursor + </a:t>
+            </a:r>
+            <a:r>
+              <a:rPr lang="pt-BR" dirty="0" err="1">
+                <a:solidFill>
+                  <a:schemeClr val="bg1"/>
+                </a:solidFill>
+              </a:rPr>
+              <a:t>NestJS</a:t>
+            </a:r>
+            <a:r>
+              <a:rPr lang="pt-BR" dirty="0">
+                <a:solidFill>
+                  <a:schemeClr val="bg1"/>
+                </a:solidFill>
+              </a:rPr>
+              <a:t>)</a:t>
+            </a:r>
+            <a:endParaRPr dirty="0">
+              <a:solidFill>
+                <a:schemeClr val="bg1"/>
+              </a:solidFill>
+            </a:endParaRPr>
+          </a:p>
+        </p:txBody>
+      </p:sp>
+      <p:sp>
+        <p:nvSpPr>
+          <p:cNvPr id="6" name="Content Placeholder 2">
+            <a:extLst>
+              <a:ext uri="{FF2B5EF4-FFF2-40B4-BE49-F238E27FC236}">
+                <a16:creationId xmlns:a16="http://schemas.microsoft.com/office/drawing/2014/main" id="{6B019F8D-BC7F-4AC6-8D6F-31459CE912EA}"/>
+              </a:ext>
+            </a:extLst>
+          </p:cNvPr>
+          <p:cNvSpPr txBox="1">
+            <a:spLocks/>
+          </p:cNvSpPr>
+          <p:nvPr/>
+        </p:nvSpPr>
+        <p:spPr>
+          <a:xfrm>
+            <a:off x="519111" y="2278347"/>
+            <a:ext cx="9753601" cy="3693319"/>
+          </a:xfrm>
+          <a:prstGeom prst="rect">
+            <a:avLst/>
+          </a:prstGeom>
+          <a:noFill/>
+          <a:ln>
+            <a:noFill/>
+          </a:ln>
+        </p:spPr>
+        <p:txBody>
+          <a:bodyPr spcFirstLastPara="1" wrap="square" lIns="0" tIns="0" rIns="0" bIns="0" anchor="t" anchorCtr="0">
+            <a:spAutoFit/>
+          </a:bodyPr>
+          <a:lstStyle>
+            <a:defPPr marR="0" lvl="0" algn="l" rtl="0">
+              <a:lnSpc>
+                <a:spcPct val="100000"/>
+              </a:lnSpc>
+              <a:spcBef>
+                <a:spcPts val="0"/>
+              </a:spcBef>
+              <a:spcAft>
+                <a:spcPts val="0"/>
+              </a:spcAft>
+            </a:defPPr>
+            <a:lvl1pPr marL="0" indent="0">
+              <a:lnSpc>
+                <a:spcPct val="150000"/>
+              </a:lnSpc>
+              <a:buNone/>
+              <a:defRPr sz="1650">
+                <a:solidFill>
+                  <a:srgbClr val="DAFFDE"/>
+                </a:solidFill>
+                <a:latin typeface="Urbanist"/>
+                <a:ea typeface="Urbanist"/>
+                <a:cs typeface="Urbanist"/>
+              </a:defRPr>
+            </a:lvl1pPr>
+            <a:lvl2pPr marR="0" lvl="1" algn="l" rtl="0">
+              <a:lnSpc>
+                <a:spcPct val="100000"/>
+              </a:lnSpc>
+              <a:spcBef>
+                <a:spcPts val="0"/>
+              </a:spcBef>
+              <a:spcAft>
+                <a:spcPts val="0"/>
+              </a:spcAft>
+              <a:buClr>
+                <a:srgbClr val="000000"/>
+              </a:buClr>
+              <a:buFont typeface="Arial"/>
+              <a:defRPr sz="1400" b="0" i="0" u="none" strike="noStrike" cap="none">
+                <a:solidFill>
+                  <a:srgbClr val="000000"/>
+                </a:solidFill>
+                <a:latin typeface="Arial"/>
+                <a:ea typeface="Arial"/>
+                <a:cs typeface="Arial"/>
+                <a:sym typeface="Arial"/>
+              </a:defRPr>
+            </a:lvl2pPr>
+            <a:lvl3pPr marR="0" lvl="2" algn="l" rtl="0">
+              <a:lnSpc>
+                <a:spcPct val="100000"/>
+              </a:lnSpc>
+              <a:spcBef>
+                <a:spcPts val="0"/>
+              </a:spcBef>
+              <a:spcAft>
+                <a:spcPts val="0"/>
+              </a:spcAft>
+              <a:buClr>
+                <a:srgbClr val="000000"/>
+              </a:buClr>
+              <a:buFont typeface="Arial"/>
+              <a:defRPr sz="1400" b="0" i="0" u="none" strike="noStrike" cap="none">
+                <a:solidFill>
+                  <a:srgbClr val="000000"/>
+                </a:solidFill>
+                <a:latin typeface="Arial"/>
+                <a:ea typeface="Arial"/>
+                <a:cs typeface="Arial"/>
+                <a:sym typeface="Arial"/>
+              </a:defRPr>
+            </a:lvl3pPr>
+            <a:lvl4pPr marR="0" lvl="3" algn="l" rtl="0">
+              <a:lnSpc>
+                <a:spcPct val="100000"/>
+              </a:lnSpc>
+              <a:spcBef>
+                <a:spcPts val="0"/>
+              </a:spcBef>
+              <a:spcAft>
+                <a:spcPts val="0"/>
+              </a:spcAft>
+              <a:buClr>
+                <a:srgbClr val="000000"/>
+              </a:buClr>
+              <a:buFont typeface="Arial"/>
+              <a:defRPr sz="1400" b="0" i="0" u="none" strike="noStrike" cap="none">
+                <a:solidFill>
+                  <a:srgbClr val="000000"/>
+                </a:solidFill>
+                <a:latin typeface="Arial"/>
+                <a:ea typeface="Arial"/>
+                <a:cs typeface="Arial"/>
+                <a:sym typeface="Arial"/>
+              </a:defRPr>
+            </a:lvl4pPr>
+            <a:lvl5pPr marR="0" lvl="4" algn="l" rtl="0">
+              <a:lnSpc>
+                <a:spcPct val="100000"/>
+              </a:lnSpc>
+              <a:spcBef>
+                <a:spcPts val="0"/>
+              </a:spcBef>
+              <a:spcAft>
+                <a:spcPts val="0"/>
+              </a:spcAft>
+              <a:buClr>
+                <a:srgbClr val="000000"/>
+              </a:buClr>
+              <a:buFont typeface="Arial"/>
+              <a:defRPr sz="1400" b="0" i="0" u="none" strike="noStrike" cap="none">
+                <a:solidFill>
+                  <a:srgbClr val="000000"/>
+                </a:solidFill>
+                <a:latin typeface="Arial"/>
+                <a:ea typeface="Arial"/>
+                <a:cs typeface="Arial"/>
+                <a:sym typeface="Arial"/>
+              </a:defRPr>
+            </a:lvl5pPr>
+            <a:lvl6pPr marR="0" lvl="5" algn="l" rtl="0">
+              <a:lnSpc>
+                <a:spcPct val="100000"/>
+              </a:lnSpc>
+              <a:spcBef>
+                <a:spcPts val="0"/>
+              </a:spcBef>
+              <a:spcAft>
+                <a:spcPts val="0"/>
+              </a:spcAft>
+              <a:buClr>
+                <a:srgbClr val="000000"/>
+              </a:buClr>
+              <a:buFont typeface="Arial"/>
+              <a:defRPr sz="1400" b="0" i="0" u="none" strike="noStrike" cap="none">
+                <a:solidFill>
+                  <a:srgbClr val="000000"/>
+                </a:solidFill>
+                <a:latin typeface="Arial"/>
+                <a:ea typeface="Arial"/>
+                <a:cs typeface="Arial"/>
+                <a:sym typeface="Arial"/>
+              </a:defRPr>
+            </a:lvl6pPr>
+            <a:lvl7pPr marR="0" lvl="6" algn="l" rtl="0">
+              <a:lnSpc>
+                <a:spcPct val="100000"/>
+              </a:lnSpc>
+              <a:spcBef>
+                <a:spcPts val="0"/>
+              </a:spcBef>
+              <a:spcAft>
+                <a:spcPts val="0"/>
+              </a:spcAft>
+              <a:buClr>
+                <a:srgbClr val="000000"/>
+              </a:buClr>
+              <a:buFont typeface="Arial"/>
+              <a:defRPr sz="1400" b="0" i="0" u="none" strike="noStrike" cap="none">
+                <a:solidFill>
+                  <a:srgbClr val="000000"/>
+                </a:solidFill>
+                <a:latin typeface="Arial"/>
+                <a:ea typeface="Arial"/>
+                <a:cs typeface="Arial"/>
+                <a:sym typeface="Arial"/>
+              </a:defRPr>
+            </a:lvl7pPr>
+            <a:lvl8pPr marR="0" lvl="7" algn="l" rtl="0">
+              <a:lnSpc>
+                <a:spcPct val="100000"/>
+              </a:lnSpc>
+              <a:spcBef>
+                <a:spcPts val="0"/>
+              </a:spcBef>
+              <a:spcAft>
+                <a:spcPts val="0"/>
+              </a:spcAft>
+              <a:buClr>
+                <a:srgbClr val="000000"/>
+              </a:buClr>
+              <a:buFont typeface="Arial"/>
+              <a:defRPr sz="1400" b="0" i="0" u="none" strike="noStrike" cap="none">
+                <a:solidFill>
+                  <a:srgbClr val="000000"/>
+                </a:solidFill>
+                <a:latin typeface="Arial"/>
+                <a:ea typeface="Arial"/>
+                <a:cs typeface="Arial"/>
+                <a:sym typeface="Arial"/>
+              </a:defRPr>
+            </a:lvl8pPr>
+            <a:lvl9pPr marR="0" lvl="8" algn="l" rtl="0">
+              <a:lnSpc>
+                <a:spcPct val="100000"/>
+              </a:lnSpc>
+              <a:spcBef>
+                <a:spcPts val="0"/>
+              </a:spcBef>
+              <a:spcAft>
+                <a:spcPts val="0"/>
+              </a:spcAft>
+              <a:buClr>
+                <a:srgbClr val="000000"/>
+              </a:buClr>
+              <a:buFont typeface="Arial"/>
+              <a:defRPr sz="1400" b="0" i="0" u="none" strike="noStrike" cap="none">
+                <a:solidFill>
+                  <a:srgbClr val="000000"/>
+                </a:solidFill>
+                <a:latin typeface="Arial"/>
+                <a:ea typeface="Arial"/>
+                <a:cs typeface="Arial"/>
+                <a:sym typeface="Arial"/>
+              </a:defRPr>
+            </a:lvl9pPr>
+          </a:lstStyle>
+          <a:p>
+            <a:r>
+              <a:rPr lang="pt-BR" sz="1600" b="1" dirty="0">
+                <a:solidFill>
+                  <a:srgbClr val="3B5BDB"/>
+                </a:solidFill>
+              </a:rPr>
+              <a:t>01 </a:t>
+            </a:r>
+            <a:r>
+              <a:rPr lang="pt-BR" sz="1600" dirty="0">
+                <a:solidFill>
+                  <a:schemeClr val="bg1"/>
+                </a:solidFill>
+              </a:rPr>
+              <a:t>— Setup, Prisma </a:t>
+            </a:r>
+            <a:r>
+              <a:rPr lang="pt-BR" sz="1600" dirty="0" err="1">
+                <a:solidFill>
+                  <a:schemeClr val="bg1"/>
+                </a:solidFill>
+              </a:rPr>
+              <a:t>Schema</a:t>
+            </a:r>
+            <a:r>
+              <a:rPr lang="pt-BR" sz="1600" dirty="0">
+                <a:solidFill>
+                  <a:schemeClr val="bg1"/>
+                </a:solidFill>
+              </a:rPr>
+              <a:t> e </a:t>
+            </a:r>
+            <a:r>
+              <a:rPr lang="pt-BR" sz="1600" dirty="0" err="1">
+                <a:solidFill>
+                  <a:schemeClr val="bg1"/>
+                </a:solidFill>
+              </a:rPr>
+              <a:t>Supabase</a:t>
+            </a:r>
+            <a:br>
+              <a:rPr lang="pt-BR" sz="1600" dirty="0">
+                <a:solidFill>
+                  <a:schemeClr val="bg1"/>
+                </a:solidFill>
+              </a:rPr>
+            </a:br>
+            <a:r>
+              <a:rPr lang="pt-BR" sz="1600" dirty="0">
+                <a:solidFill>
+                  <a:schemeClr val="bg1"/>
+                </a:solidFill>
+              </a:rPr>
+              <a:t>Estrutura base, .</a:t>
+            </a:r>
+            <a:r>
+              <a:rPr lang="pt-BR" sz="1600" dirty="0" err="1">
+                <a:solidFill>
+                  <a:schemeClr val="bg1"/>
+                </a:solidFill>
+              </a:rPr>
+              <a:t>env</a:t>
+            </a:r>
+            <a:r>
+              <a:rPr lang="pt-BR" sz="1600" dirty="0">
+                <a:solidFill>
+                  <a:schemeClr val="bg1"/>
+                </a:solidFill>
+              </a:rPr>
+              <a:t>, models Prisma, </a:t>
+            </a:r>
+            <a:r>
+              <a:rPr lang="pt-BR" sz="1600" dirty="0" err="1">
+                <a:solidFill>
+                  <a:schemeClr val="bg1"/>
+                </a:solidFill>
+              </a:rPr>
+              <a:t>seed</a:t>
+            </a:r>
+            <a:r>
+              <a:rPr lang="pt-BR" sz="1600" dirty="0">
+                <a:solidFill>
+                  <a:schemeClr val="bg1"/>
+                </a:solidFill>
+              </a:rPr>
+              <a:t> e conexão com </a:t>
+            </a:r>
+            <a:r>
+              <a:rPr lang="pt-BR" sz="1600" dirty="0" err="1">
+                <a:solidFill>
+                  <a:schemeClr val="bg1"/>
+                </a:solidFill>
+              </a:rPr>
+              <a:t>Supabase</a:t>
+            </a:r>
+            <a:r>
+              <a:rPr lang="pt-BR" sz="1600" dirty="0">
+                <a:solidFill>
+                  <a:schemeClr val="bg1"/>
+                </a:solidFill>
+              </a:rPr>
+              <a:t>.</a:t>
+            </a:r>
+          </a:p>
+          <a:p>
+            <a:r>
+              <a:rPr lang="pt-BR" sz="1600" b="1" dirty="0">
+                <a:solidFill>
+                  <a:srgbClr val="3B5BDB"/>
+                </a:solidFill>
+              </a:rPr>
+              <a:t>02</a:t>
+            </a:r>
+            <a:r>
+              <a:rPr lang="pt-BR" sz="1600" dirty="0">
+                <a:solidFill>
+                  <a:schemeClr val="bg1"/>
+                </a:solidFill>
+              </a:rPr>
+              <a:t> — Autenticação (JWT Guard + Passport)</a:t>
+            </a:r>
+            <a:br>
+              <a:rPr lang="pt-BR" sz="1600" dirty="0">
+                <a:solidFill>
+                  <a:schemeClr val="bg1"/>
+                </a:solidFill>
+              </a:rPr>
+            </a:br>
+            <a:r>
+              <a:rPr lang="pt-BR" sz="1600" dirty="0">
+                <a:solidFill>
+                  <a:schemeClr val="bg1"/>
+                </a:solidFill>
+              </a:rPr>
+              <a:t>Valida token </a:t>
+            </a:r>
+            <a:r>
+              <a:rPr lang="pt-BR" sz="1600" dirty="0" err="1">
+                <a:solidFill>
+                  <a:schemeClr val="bg1"/>
+                </a:solidFill>
+              </a:rPr>
+              <a:t>Supabase</a:t>
+            </a:r>
+            <a:r>
+              <a:rPr lang="pt-BR" sz="1600" dirty="0">
+                <a:solidFill>
+                  <a:schemeClr val="bg1"/>
+                </a:solidFill>
+              </a:rPr>
+              <a:t>, cria usuário interno e expõe @CurrentUser.</a:t>
+            </a:r>
+          </a:p>
+          <a:p>
+            <a:r>
+              <a:rPr lang="pt-BR" sz="1600" b="1" dirty="0">
+                <a:solidFill>
+                  <a:srgbClr val="3B5BDB"/>
+                </a:solidFill>
+              </a:rPr>
+              <a:t>03</a:t>
+            </a:r>
+            <a:r>
+              <a:rPr lang="pt-BR" sz="1600" dirty="0">
+                <a:solidFill>
+                  <a:schemeClr val="bg1"/>
+                </a:solidFill>
+              </a:rPr>
+              <a:t> — Módulos de Áreas e Usuários</a:t>
+            </a:r>
+            <a:br>
+              <a:rPr lang="pt-BR" sz="1600" dirty="0">
+                <a:solidFill>
+                  <a:schemeClr val="bg1"/>
+                </a:solidFill>
+              </a:rPr>
+            </a:br>
+            <a:r>
+              <a:rPr lang="pt-BR" sz="1600" dirty="0">
+                <a:solidFill>
+                  <a:schemeClr val="bg1"/>
+                </a:solidFill>
+              </a:rPr>
+              <a:t>CRUD de áreas, canais de contato, responsáveis e perfis.</a:t>
+            </a:r>
+          </a:p>
+          <a:p>
+            <a:r>
+              <a:rPr lang="pt-BR" sz="1600" b="1" dirty="0">
+                <a:solidFill>
+                  <a:srgbClr val="3B5BDB"/>
+                </a:solidFill>
+              </a:rPr>
+              <a:t>04</a:t>
+            </a:r>
+            <a:r>
+              <a:rPr lang="pt-BR" sz="1600" dirty="0">
+                <a:solidFill>
+                  <a:schemeClr val="bg1"/>
+                </a:solidFill>
+              </a:rPr>
+              <a:t> — Demandas, Notificações e Busca</a:t>
+            </a:r>
+            <a:br>
+              <a:rPr lang="pt-BR" sz="1600" dirty="0">
+                <a:solidFill>
+                  <a:schemeClr val="bg1"/>
+                </a:solidFill>
+              </a:rPr>
+            </a:br>
+            <a:r>
+              <a:rPr lang="pt-BR" sz="1600" dirty="0">
+                <a:solidFill>
+                  <a:schemeClr val="bg1"/>
+                </a:solidFill>
+              </a:rPr>
+              <a:t>Transições de status, histórico, triagem, </a:t>
+            </a:r>
+            <a:r>
+              <a:rPr lang="pt-BR" sz="1600" dirty="0" err="1">
+                <a:solidFill>
+                  <a:schemeClr val="bg1"/>
+                </a:solidFill>
+              </a:rPr>
+              <a:t>Resend</a:t>
+            </a:r>
+            <a:r>
+              <a:rPr lang="pt-BR" sz="1600" dirty="0">
+                <a:solidFill>
+                  <a:schemeClr val="bg1"/>
+                </a:solidFill>
+              </a:rPr>
+              <a:t> e busca global.</a:t>
+            </a:r>
+          </a:p>
+          <a:p>
+            <a:r>
+              <a:rPr lang="pt-BR" sz="1600" b="1" dirty="0">
+                <a:solidFill>
+                  <a:srgbClr val="3B5BDB"/>
+                </a:solidFill>
+              </a:rPr>
+              <a:t>05</a:t>
+            </a:r>
+            <a:r>
+              <a:rPr lang="pt-BR" sz="1600" dirty="0">
+                <a:solidFill>
+                  <a:schemeClr val="bg1"/>
+                </a:solidFill>
+              </a:rPr>
+              <a:t> — Processos, Dashboard e </a:t>
+            </a:r>
+            <a:r>
+              <a:rPr lang="pt-BR" sz="1600" dirty="0" err="1">
+                <a:solidFill>
+                  <a:schemeClr val="bg1"/>
+                </a:solidFill>
+              </a:rPr>
+              <a:t>Deploy</a:t>
+            </a:r>
+            <a:br>
+              <a:rPr lang="pt-BR" sz="1600" dirty="0">
+                <a:solidFill>
+                  <a:schemeClr val="bg1"/>
+                </a:solidFill>
+              </a:rPr>
+            </a:br>
+            <a:r>
+              <a:rPr lang="pt-BR" sz="1600" dirty="0">
+                <a:solidFill>
+                  <a:schemeClr val="bg1"/>
+                </a:solidFill>
+              </a:rPr>
+              <a:t>Processos, </a:t>
+            </a:r>
+            <a:r>
+              <a:rPr lang="pt-BR" sz="1600" dirty="0" err="1">
+                <a:solidFill>
+                  <a:schemeClr val="bg1"/>
+                </a:solidFill>
+              </a:rPr>
+              <a:t>endpoint</a:t>
+            </a:r>
+            <a:r>
+              <a:rPr lang="pt-BR" sz="1600" dirty="0">
+                <a:solidFill>
+                  <a:schemeClr val="bg1"/>
+                </a:solidFill>
+              </a:rPr>
+              <a:t> /dashboard, rate </a:t>
+            </a:r>
+            <a:r>
+              <a:rPr lang="pt-BR" sz="1600" dirty="0" err="1">
+                <a:solidFill>
+                  <a:schemeClr val="bg1"/>
+                </a:solidFill>
+              </a:rPr>
+              <a:t>limiting</a:t>
+            </a:r>
+            <a:r>
+              <a:rPr lang="pt-BR" sz="1600" dirty="0">
+                <a:solidFill>
+                  <a:schemeClr val="bg1"/>
+                </a:solidFill>
+              </a:rPr>
+              <a:t>, </a:t>
+            </a:r>
+            <a:r>
+              <a:rPr lang="pt-BR" sz="1600" dirty="0" err="1">
+                <a:solidFill>
+                  <a:schemeClr val="bg1"/>
+                </a:solidFill>
+              </a:rPr>
+              <a:t>seed</a:t>
+            </a:r>
+            <a:r>
+              <a:rPr lang="pt-BR" sz="1600" dirty="0">
+                <a:solidFill>
+                  <a:schemeClr val="bg1"/>
+                </a:solidFill>
+              </a:rPr>
+              <a:t> e Railway.</a:t>
+            </a:r>
+          </a:p>
+        </p:txBody>
+      </p:sp>
+    </p:spTree>
+    <p:extLst>
+      <p:ext uri="{BB962C8B-B14F-4D97-AF65-F5344CB8AC3E}">
+        <p14:creationId xmlns:p14="http://schemas.microsoft.com/office/powerpoint/2010/main" val="3772185579"/>
+      </p:ext>
+    </p:extLst>
+  </p:cSld>
+  <p:clrMapOvr>
+    <a:masterClrMapping/>
+  </p:clrMapOvr>
+</p:sld>
+</file>
+
+<file path=ppt/slides/slide14.xml><?xml version="1.0" encoding="utf-8"?>
 <p:sld xmlns:a="http://schemas.openxmlformats.org/drawingml/2006/main" xmlns:r="http://schemas.openxmlformats.org/officeDocument/2006/relationships" xmlns:p="http://schemas.openxmlformats.org/presentationml/2006/main">
   <p:cSld>
     <p:bg>
@@ -13978,61 +15636,13 @@
       </p:sp>
       <p:sp>
         <p:nvSpPr>
-          <p:cNvPr id="248" name="Google Shape;248;p25"/>
-          <p:cNvSpPr/>
-          <p:nvPr/>
-        </p:nvSpPr>
-        <p:spPr>
-          <a:xfrm>
-            <a:off x="571500" y="4115544"/>
-            <a:ext cx="11049000" cy="9525"/>
-          </a:xfrm>
-          <a:prstGeom prst="rect">
-            <a:avLst/>
-          </a:prstGeom>
-          <a:solidFill>
-            <a:srgbClr val="757575"/>
-          </a:solidFill>
-          <a:ln>
-            <a:noFill/>
-          </a:ln>
-        </p:spPr>
-        <p:txBody>
-          <a:bodyPr spcFirstLastPara="1" wrap="square" lIns="91425" tIns="45700" rIns="91425" bIns="45700" anchor="ctr" anchorCtr="0">
-            <a:noAutofit/>
-          </a:bodyPr>
-          <a:lstStyle/>
-          <a:p>
-            <a:pPr marL="0" marR="0" lvl="0" indent="0" algn="ctr" rtl="0">
-              <a:spcBef>
-                <a:spcPts val="0"/>
-              </a:spcBef>
-              <a:spcAft>
-                <a:spcPts val="0"/>
-              </a:spcAft>
-              <a:buNone/>
-            </a:pPr>
-            <a:endParaRPr sz="1800" b="0" i="0" u="none" strike="noStrike" cap="none">
-              <a:solidFill>
-                <a:schemeClr val="dk1"/>
-              </a:solidFill>
-              <a:latin typeface="Calibri"/>
-              <a:ea typeface="Calibri"/>
-              <a:cs typeface="Calibri"/>
-              <a:sym typeface="Calibri"/>
-            </a:endParaRPr>
-          </a:p>
-        </p:txBody>
-      </p:sp>
-      <p:sp>
-        <p:nvSpPr>
           <p:cNvPr id="249" name="Google Shape;249;p25"/>
           <p:cNvSpPr/>
           <p:nvPr/>
         </p:nvSpPr>
         <p:spPr>
           <a:xfrm>
-            <a:off x="571500" y="4115544"/>
+            <a:off x="571500" y="3344016"/>
             <a:ext cx="11049000" cy="9525"/>
           </a:xfrm>
           <a:prstGeom prst="rect">
@@ -14087,7 +15697,7 @@
         </p:blipFill>
         <p:spPr>
           <a:xfrm>
-            <a:off x="571500" y="3011256"/>
+            <a:off x="571500" y="2239728"/>
             <a:ext cx="1730552" cy="961425"/>
           </a:xfrm>
           <a:prstGeom prst="rect">
@@ -14107,7 +15717,7 @@
         </p:nvSpPr>
         <p:spPr>
           <a:xfrm>
-            <a:off x="2464149" y="3011250"/>
+            <a:off x="2464149" y="2199381"/>
             <a:ext cx="6976800" cy="303000"/>
           </a:xfrm>
           <a:prstGeom prst="rect">
@@ -14137,7 +15747,7 @@
               <a:buNone/>
             </a:pPr>
             <a:r>
-              <a:rPr lang="en-US" sz="1968">
+              <a:rPr lang="en-US" sz="1968" dirty="0" err="1">
                 <a:solidFill>
                   <a:srgbClr val="DAFFDE"/>
                 </a:solidFill>
@@ -14146,9 +15756,21 @@
                 <a:cs typeface="Urbanist"/>
                 <a:sym typeface="Urbanist"/>
               </a:rPr>
-              <a:t>Visualização da Ferramenta</a:t>
+              <a:t>Visualização</a:t>
             </a:r>
-            <a:endParaRPr sz="2826"/>
+            <a:r>
+              <a:rPr lang="en-US" sz="1968" dirty="0">
+                <a:solidFill>
+                  <a:srgbClr val="DAFFDE"/>
+                </a:solidFill>
+                <a:latin typeface="Urbanist"/>
+                <a:ea typeface="Urbanist"/>
+                <a:cs typeface="Urbanist"/>
+                <a:sym typeface="Urbanist"/>
+              </a:rPr>
+              <a:t> da Ferramenta</a:t>
+            </a:r>
+            <a:endParaRPr sz="2826" dirty="0"/>
           </a:p>
         </p:txBody>
       </p:sp>
@@ -14160,7 +15782,7 @@
         </p:nvSpPr>
         <p:spPr>
           <a:xfrm>
-            <a:off x="2519350" y="3744075"/>
+            <a:off x="2519350" y="2905312"/>
             <a:ext cx="5708700" cy="184800"/>
           </a:xfrm>
           <a:prstGeom prst="rect">
@@ -14190,7 +15812,7 @@
               <a:buNone/>
             </a:pPr>
             <a:r>
-              <a:rPr lang="en-US" sz="1200" b="0" i="0" u="none" strike="noStrike" cap="none">
+              <a:rPr lang="en-US" sz="1200" b="0" i="0" u="none" strike="noStrike" cap="none" dirty="0">
                 <a:solidFill>
                   <a:srgbClr val="DAFFDE"/>
                 </a:solidFill>
@@ -14202,7 +15824,7 @@
               <a:t>Source: </a:t>
             </a:r>
             <a:r>
-              <a:rPr lang="en-US" sz="1200">
+              <a:rPr lang="en-US" sz="1200" dirty="0">
                 <a:solidFill>
                   <a:srgbClr val="4F46E5"/>
                 </a:solidFill>
@@ -14213,7 +15835,7 @@
               </a:rPr>
               <a:t>https://manactions.vercel.app/</a:t>
             </a:r>
-            <a:endParaRPr/>
+            <a:endParaRPr dirty="0"/>
           </a:p>
         </p:txBody>
       </p:sp>
@@ -14328,7 +15950,7 @@
         </p:blipFill>
         <p:spPr>
           <a:xfrm>
-            <a:off x="571500" y="4358706"/>
+            <a:off x="571500" y="3587178"/>
             <a:ext cx="1730551" cy="961425"/>
           </a:xfrm>
           <a:prstGeom prst="rect">
@@ -14348,7 +15970,7 @@
         </p:nvSpPr>
         <p:spPr>
           <a:xfrm>
-            <a:off x="2464149" y="4358700"/>
+            <a:off x="2464149" y="3587172"/>
             <a:ext cx="6976800" cy="303000"/>
           </a:xfrm>
           <a:prstGeom prst="rect">
@@ -14378,7 +16000,7 @@
               <a:buNone/>
             </a:pPr>
             <a:r>
-              <a:rPr lang="en-US" sz="1968">
+              <a:rPr lang="en-US" sz="1968" dirty="0" err="1">
                 <a:solidFill>
                   <a:srgbClr val="DAFFDE"/>
                 </a:solidFill>
@@ -14387,9 +16009,21 @@
                 <a:cs typeface="Urbanist"/>
                 <a:sym typeface="Urbanist"/>
               </a:rPr>
-              <a:t>Visualização do Código</a:t>
+              <a:t>Visualização</a:t>
             </a:r>
-            <a:endParaRPr sz="2826"/>
+            <a:r>
+              <a:rPr lang="en-US" sz="1968" dirty="0">
+                <a:solidFill>
+                  <a:srgbClr val="DAFFDE"/>
+                </a:solidFill>
+                <a:latin typeface="Urbanist"/>
+                <a:ea typeface="Urbanist"/>
+                <a:cs typeface="Urbanist"/>
+                <a:sym typeface="Urbanist"/>
+              </a:rPr>
+              <a:t> do Código</a:t>
+            </a:r>
+            <a:endParaRPr sz="2826" dirty="0"/>
           </a:p>
         </p:txBody>
       </p:sp>
@@ -14401,7 +16035,7 @@
         </p:nvSpPr>
         <p:spPr>
           <a:xfrm>
-            <a:off x="2519350" y="5091525"/>
+            <a:off x="2519350" y="4293103"/>
             <a:ext cx="5708700" cy="184800"/>
           </a:xfrm>
           <a:prstGeom prst="rect">
@@ -14431,7 +16065,7 @@
               <a:buNone/>
             </a:pPr>
             <a:r>
-              <a:rPr lang="en-US" sz="1200" b="0" i="0" u="none" strike="noStrike" cap="none">
+              <a:rPr lang="en-US" sz="1200" b="0" i="0" u="none" strike="noStrike" cap="none" dirty="0">
                 <a:solidFill>
                   <a:srgbClr val="DAFFDE"/>
                 </a:solidFill>
@@ -14443,7 +16077,7 @@
               <a:t>Source: </a:t>
             </a:r>
             <a:r>
-              <a:rPr lang="en-US" sz="1200">
+              <a:rPr lang="en-US" sz="1200" dirty="0">
                 <a:solidFill>
                   <a:srgbClr val="4F46E5"/>
                 </a:solidFill>
@@ -14454,7 +16088,7 @@
               </a:rPr>
               <a:t>https://github.com/EzequiellSantos/Manactions</a:t>
             </a:r>
-            <a:endParaRPr/>
+            <a:endParaRPr dirty="0"/>
           </a:p>
         </p:txBody>
       </p:sp>
